--- a/docs/content/multiple_regression/multiple_regression_activity.pptx
+++ b/docs/content/multiple_regression/multiple_regression_activity.pptx
@@ -6656,7 +6656,7 @@
                 </a:solidFill>
                 <a:latin typeface="Courier"/>
               </a:rPr>
-              <a:t>"steelblue"</a:t>
+              <a:t>"darkblue"</a:t>
             </a:r>
             <a:r>
               <a:rPr>

--- a/docs/content/multiple_regression/multiple_regression_activity.pptx
+++ b/docs/content/multiple_regression/multiple_regression_activity.pptx
@@ -18,6 +18,7 @@
     <p:sldId id="266" r:id="rId12"/>
     <p:sldId id="267" r:id="rId13"/>
     <p:sldId id="268" r:id="rId14"/>
+    <p:sldId id="269" r:id="rId15"/>
   </p:sldIdLst>
   <p:sldSz cx="9144000" cy="5143500" type="screen16x9"/>
   <p:notesSz cx="6858000" cy="9144000"/>
@@ -4453,6 +4454,436 @@
 </file>
 
 <file path=ppt/slides/slide13.xml><?xml version="1.0" encoding="utf-8"?>
+<p:sld xmlns:a="http://schemas.openxmlformats.org/drawingml/2006/main" xmlns:r="http://schemas.openxmlformats.org/officeDocument/2006/relationships" xmlns:p="http://schemas.openxmlformats.org/presentationml/2006/main">
+  <p:cSld>
+    <p:spTree>
+      <p:nvGrpSpPr>
+        <p:cNvPr id="1" name=""/>
+        <p:cNvGrpSpPr/>
+        <p:nvPr/>
+      </p:nvGrpSpPr>
+      <p:grpSpPr>
+        <a:xfrm>
+          <a:off x="0" y="0"/>
+          <a:ext cx="0" cy="0"/>
+          <a:chOff x="0" y="0"/>
+          <a:chExt cx="0" cy="0"/>
+        </a:xfrm>
+      </p:grpSpPr>
+      <p:sp>
+        <p:nvSpPr>
+          <p:cNvPr id="2" name="Title 1"/>
+          <p:cNvSpPr>
+            <a:spLocks noGrp="1"/>
+          </p:cNvSpPr>
+          <p:nvPr>
+            <p:ph type="title"/>
+          </p:nvPr>
+        </p:nvSpPr>
+        <p:spPr>
+          <a:xfrm>
+            <a:off x="0" y="0"/>
+            <a:ext cx="9144000" cy="582780"/>
+          </a:xfrm>
+        </p:spPr>
+        <p:txBody>
+          <a:bodyPr/>
+          <a:lstStyle/>
+          <a:p>
+            <a:pPr lvl="0" indent="0" marL="0">
+              <a:buNone/>
+            </a:pPr>
+            <a:r>
+              <a:rPr/>
+              <a:t>Part 9 · Take-Home Extension — Nutrients and Chlorophyll in New Zealand Lakes</a:t>
+            </a:r>
+          </a:p>
+        </p:txBody>
+      </p:sp>
+      <p:sp>
+        <p:nvSpPr>
+          <p:cNvPr id="3" name="Content Placeholder 2"/>
+          <p:cNvSpPr>
+            <a:spLocks noGrp="1"/>
+          </p:cNvSpPr>
+          <p:nvPr>
+            <p:ph idx="1"/>
+          </p:nvPr>
+        </p:nvSpPr>
+        <p:spPr/>
+        <p:txBody>
+          <a:bodyPr/>
+          <a:lstStyle/>
+          <a:p>
+            <a:pPr lvl="0" indent="0" marL="0">
+              <a:buNone/>
+            </a:pPr>
+            <a:r>
+              <a:rPr i="1"/>
+              <a:t>Due Monday, October 19 — before the Analysis of Variance class.</a:t>
+            </a:r>
+          </a:p>
+          <a:p>
+            <a:pPr lvl="0" indent="0" marL="0">
+              <a:buNone/>
+            </a:pPr>
+            <a:r>
+              <a:rPr/>
+              <a:t>Same workflow as Parts 1–6 — correlation/multicollinearity check, fit the model, diagnose, transform if needed, interpret — new dataset, new question. This time you decide what (if anything) needs fixing before you trust the model; nobody walks you through it step by step.</a:t>
+            </a:r>
+          </a:p>
+          <a:p>
+            <a:pPr lvl="0" indent="0" marL="0">
+              <a:spcBef>
+                <a:spcPts val="3000"/>
+              </a:spcBef>
+              <a:buNone/>
+            </a:pPr>
+            <a:r>
+              <a:rPr b="1"/>
+              <a:t>Background</a:t>
+            </a:r>
+          </a:p>
+          <a:p>
+            <a:pPr lvl="0" indent="0" marL="0">
+              <a:buNone/>
+            </a:pPr>
+            <a:r>
+              <a:rPr/>
+              <a:t>Abell et al. (2010) studied nutrient limitation in New Zealand lakes. Chlorophyll-a is a standard proxy for algal biomass, and both phosphorus and nitrogen can drive it up. Below are measurements from 111 New Zealand lakes.</a:t>
+            </a:r>
+          </a:p>
+          <a:p>
+            <a:pPr lvl="0" indent="0" marL="0">
+              <a:buNone/>
+            </a:pPr>
+            <a:r>
+              <a:rPr b="1"/>
+              <a:t>▶ Run this:</a:t>
+            </a:r>
+          </a:p>
+          <a:p>
+            <a:pPr lvl="0" indent="0">
+              <a:buNone/>
+            </a:pPr>
+            <a:r>
+              <a:rPr>
+                <a:solidFill>
+                  <a:srgbClr val="003B4F"/>
+                </a:solidFill>
+                <a:latin typeface="Courier"/>
+              </a:rPr>
+              <a:t>nz_df &lt;- </a:t>
+            </a:r>
+            <a:r>
+              <a:rPr>
+                <a:solidFill>
+                  <a:srgbClr val="4758AB"/>
+                </a:solidFill>
+                <a:latin typeface="Courier"/>
+              </a:rPr>
+              <a:t>read_csv</a:t>
+            </a:r>
+            <a:r>
+              <a:rPr>
+                <a:solidFill>
+                  <a:srgbClr val="003B4F"/>
+                </a:solidFill>
+                <a:latin typeface="Courier"/>
+              </a:rPr>
+              <a:t>(</a:t>
+            </a:r>
+            <a:r>
+              <a:rPr>
+                <a:solidFill>
+                  <a:srgbClr val="20794D"/>
+                </a:solidFill>
+                <a:latin typeface="Courier"/>
+              </a:rPr>
+              <a:t>"data/abel_et_al_lakes_data.csv"</a:t>
+            </a:r>
+            <a:r>
+              <a:rPr>
+                <a:solidFill>
+                  <a:srgbClr val="003B4F"/>
+                </a:solidFill>
+                <a:latin typeface="Courier"/>
+              </a:rPr>
+              <a:t>)</a:t>
+            </a:r>
+            <a:br/>
+            <a:r>
+              <a:rPr>
+                <a:solidFill>
+                  <a:srgbClr val="4758AB"/>
+                </a:solidFill>
+                <a:latin typeface="Courier"/>
+              </a:rPr>
+              <a:t>head</a:t>
+            </a:r>
+            <a:r>
+              <a:rPr>
+                <a:solidFill>
+                  <a:srgbClr val="003B4F"/>
+                </a:solidFill>
+                <a:latin typeface="Courier"/>
+              </a:rPr>
+              <a:t>(nz_df)</a:t>
+            </a:r>
+          </a:p>
+          <a:p>
+            <a:pPr lvl="0" indent="0" marL="0">
+              <a:spcBef>
+                <a:spcPts val="3000"/>
+              </a:spcBef>
+              <a:buNone/>
+            </a:pPr>
+            <a:r>
+              <a:rPr b="1"/>
+              <a:t>Your Task</a:t>
+            </a:r>
+          </a:p>
+          <a:p>
+            <a:pPr lvl="0" indent="0" marL="0">
+              <a:buNone/>
+            </a:pPr>
+            <a:r>
+              <a:rPr b="1"/>
+              <a:t>Question:</a:t>
+            </a:r>
+            <a:r>
+              <a:rPr/>
+              <a:t> How do total phosphorus and total nitrogen jointly predict chlorophyll-a concentration across these lakes?</a:t>
+            </a:r>
+          </a:p>
+          <a:p>
+            <a:pPr lvl="0" indent="0" marL="0">
+              <a:buNone/>
+            </a:pPr>
+            <a:r>
+              <a:rPr/>
+              <a:t>✏️ </a:t>
+            </a:r>
+            <a:r>
+              <a:rPr b="1"/>
+              <a:t>Your turn:</a:t>
+            </a:r>
+            <a:r>
+              <a:rPr/>
+              <a:t> State your hypotheses. Check for multicollinearity between the two predictors and decide whether it’s a problem here. Look at the shape of each relationship and decide whether a transformation is needed before you trust a linear model (hint: nutrient–chlorophyll relationships are rarely linear on the raw scale). Justify whatever choices you make, then fit the model, interpret it, and report the result properly.</a:t>
+            </a:r>
+          </a:p>
+          <a:p>
+            <a:pPr lvl="0" indent="0">
+              <a:buNone/>
+            </a:pPr>
+            <a:r>
+              <a:rPr>
+                <a:latin typeface="Courier"/>
+              </a:rPr>
+              <a:t>H0 =
+________________________________________________________
+Ha =
+________________________________________________________
+Model/transformation I will use and why:
+________________________________________________________
+________________________________________________________</a:t>
+            </a:r>
+          </a:p>
+          <a:p>
+            <a:pPr lvl="0" indent="0">
+              <a:buNone/>
+            </a:pPr>
+            <a:r>
+              <a:rPr>
+                <a:solidFill>
+                  <a:srgbClr val="5E5E5E"/>
+                </a:solidFill>
+                <a:latin typeface="Courier"/>
+              </a:rPr>
+              <a:t># Write your code here:</a:t>
+            </a:r>
+          </a:p>
+          <a:p>
+            <a:pPr lvl="0" indent="0">
+              <a:buNone/>
+            </a:pPr>
+            <a:r>
+              <a:rPr>
+                <a:latin typeface="Courier"/>
+              </a:rPr>
+              <a:t>Interpretation:
+________________________________________________________
+________________________________________________________</a:t>
+            </a:r>
+          </a:p>
+          <a:p>
+            <a:pPr lvl="0" indent="0" marL="0">
+              <a:spcBef>
+                <a:spcPts val="3000"/>
+              </a:spcBef>
+              <a:buNone/>
+            </a:pPr>
+            <a:r>
+              <a:rPr b="1"/>
+              <a:t>Final Figure</a:t>
+            </a:r>
+          </a:p>
+          <a:p>
+            <a:pPr lvl="0" indent="0" marL="0">
+              <a:buNone/>
+            </a:pPr>
+            <a:r>
+              <a:rPr/>
+              <a:t>Produce one publication-quality figure showing the relationship between chlorophyll-a and the predictor(s) that mattered most — proper axis labels, no default </a:t>
+            </a:r>
+            <a:r>
+              <a:rPr>
+                <a:latin typeface="Courier"/>
+              </a:rPr>
+              <a:t>ggplot</a:t>
+            </a:r>
+            <a:r>
+              <a:rPr/>
+              <a:t> grey background — and export it with </a:t>
+            </a:r>
+            <a:r>
+              <a:rPr>
+                <a:latin typeface="Courier"/>
+              </a:rPr>
+              <a:t>ggsave()</a:t>
+            </a:r>
+            <a:r>
+              <a:rPr/>
+              <a:t>.</a:t>
+            </a:r>
+          </a:p>
+          <a:p>
+            <a:pPr lvl="0" indent="0">
+              <a:buNone/>
+            </a:pPr>
+            <a:r>
+              <a:rPr>
+                <a:solidFill>
+                  <a:srgbClr val="5E5E5E"/>
+                </a:solidFill>
+                <a:latin typeface="Courier"/>
+              </a:rPr>
+              <a:t># Write your code here:</a:t>
+            </a:r>
+          </a:p>
+          <a:p>
+            <a:pPr lvl="0" indent="0" marL="1270000">
+              <a:buNone/>
+            </a:pPr>
+            <a:r>
+              <a:rPr sz="2000" b="1"/>
+              <a:t>Note</a:t>
+            </a:r>
+          </a:p>
+          <a:p>
+            <a:pPr lvl="0" indent="0" marL="1270000">
+              <a:buNone/>
+            </a:pPr>
+            <a:r>
+              <a:rPr sz="2000" b="1"/>
+              <a:t>📤 What to turn in — due Oct 19</a:t>
+            </a:r>
+          </a:p>
+          <a:p>
+            <a:pPr lvl="0" indent="0" marL="1270000">
+              <a:buNone/>
+            </a:pPr>
+            <a:r>
+              <a:rPr sz="2000"/>
+              <a:t>Your write-up should include:</a:t>
+            </a:r>
+          </a:p>
+          <a:p>
+            <a:pPr lvl="0"/>
+            <a:r>
+              <a:rPr sz="2000"/>
+              <a:t>☐ The question</a:t>
+            </a:r>
+          </a:p>
+          <a:p>
+            <a:pPr lvl="0"/>
+            <a:r>
+              <a:rPr sz="2000"/>
+              <a:t>☐ Your hypotheses</a:t>
+            </a:r>
+          </a:p>
+          <a:p>
+            <a:pPr lvl="0"/>
+            <a:r>
+              <a:rPr sz="2000"/>
+              <a:t>☐ Which model/transformation you used, and your justification for choosing it</a:t>
+            </a:r>
+          </a:p>
+          <a:p>
+            <a:pPr lvl="0"/>
+            <a:r>
+              <a:rPr sz="2000"/>
+              <a:t>☐ The code and its output</a:t>
+            </a:r>
+          </a:p>
+          <a:p>
+            <a:pPr lvl="0"/>
+            <a:r>
+              <a:rPr sz="2000"/>
+              <a:t>☐ Your interpretation of the result</a:t>
+            </a:r>
+          </a:p>
+          <a:p>
+            <a:pPr lvl="0"/>
+            <a:r>
+              <a:rPr sz="2000"/>
+              <a:t>☐ A final figure showing the result</a:t>
+            </a:r>
+          </a:p>
+          <a:p>
+            <a:pPr lvl="0" indent="0" marL="1270000">
+              <a:buNone/>
+            </a:pPr>
+            <a:r>
+              <a:rPr sz="2000" b="1"/>
+              <a:t>Note</a:t>
+            </a:r>
+          </a:p>
+          <a:p>
+            <a:pPr lvl="0" indent="0" marL="1270000">
+              <a:buNone/>
+            </a:pPr>
+            <a:r>
+              <a:rPr sz="2000" b="1"/>
+              <a:t>Reference</a:t>
+            </a:r>
+          </a:p>
+          <a:p>
+            <a:pPr lvl="0" indent="0" marL="1270000">
+              <a:buNone/>
+            </a:pPr>
+            <a:r>
+              <a:rPr sz="2000"/>
+              <a:t>Abell, J.M., Özkundakci, D. &amp; Hamilton, D.P. (2010). Nitrogen and phosphorus limitation of phytoplankton growth in New Zealand lakes. </a:t>
+            </a:r>
+            <a:r>
+              <a:rPr sz="2000" i="1"/>
+              <a:t>Ecosystems</a:t>
+            </a:r>
+            <a:r>
+              <a:rPr sz="2000"/>
+              <a:t>, 13, 966–977.</a:t>
+            </a:r>
+          </a:p>
+        </p:txBody>
+      </p:sp>
+    </p:spTree>
+  </p:cSld>
+</p:sld>
+</file>
+
+<file path=ppt/slides/slide14.xml><?xml version="1.0" encoding="utf-8"?>
 <p:sld xmlns:a="http://schemas.openxmlformats.org/drawingml/2006/main" xmlns:r="http://schemas.openxmlformats.org/officeDocument/2006/relationships" xmlns:p="http://schemas.openxmlformats.org/presentationml/2006/main">
   <p:cSld>
     <p:spTree>
